--- a/docs/LEADER_DimASQP_Presentation_English.pptx
+++ b/docs/LEADER_DimASQP_Presentation_English.pptx
@@ -3609,13 +3609,13 @@
               </a:spcAft>
             </a:pPr>
             <a:r>
-              <a:rPr sz="2000" b="1" i="0">
+              <a:rPr sz="2800" b="1" i="0">
                 <a:solidFill>
                   <a:srgbClr val="172033"/>
                 </a:solidFill>
                 <a:latin typeface="Aptos"/>
               </a:rPr>
-              <a:t>Gains are uneven: three reported tops, but four remaining gaps</a:t>
+              <a:t>Eight dev results guide internal selection—not test ranking</a:t>
             </a:r>
           </a:p>
         </p:txBody>
@@ -3924,7 +3924,7 @@
                 </a:solidFill>
                 <a:latin typeface="Aptos"/>
               </a:rPr>
-              <a:t>strong</a:t>
+              <a:t>dev-selected</a:t>
             </a:r>
           </a:p>
         </p:txBody>
@@ -4063,223 +4063,6 @@
         <p:spPr>
           <a:xfrm>
             <a:off x="3794760" y="2148840"/>
-            <a:ext cx="2514600" cy="310896"/>
-          </a:xfrm>
-          <a:prstGeom prst="roundRect">
-            <a:avLst>
-              <a:gd name="adj" fmla="val 10000"/>
-            </a:avLst>
-          </a:prstGeom>
-          <a:solidFill>
-            <a:srgbClr val="FCEAEC"/>
-          </a:solidFill>
-          <a:ln>
-            <a:solidFill>
-              <a:srgbClr val="FCEAEC"/>
-            </a:solidFill>
-          </a:ln>
-        </p:spPr>
-        <p:style>
-          <a:lnRef idx="1">
-            <a:schemeClr val="accent1"/>
-          </a:lnRef>
-          <a:fillRef idx="3">
-            <a:schemeClr val="accent1"/>
-          </a:fillRef>
-          <a:effectRef idx="2">
-            <a:schemeClr val="accent1"/>
-          </a:effectRef>
-          <a:fontRef idx="minor">
-            <a:schemeClr val="lt1"/>
-          </a:fontRef>
-        </p:style>
-        <p:txBody>
-          <a:bodyPr rtlCol="0" anchor="ctr"/>
-          <a:lstStyle/>
-          <a:p>
-            <a:pPr algn="ctr"/>
-          </a:p>
-        </p:txBody>
-      </p:sp>
-      <p:sp>
-        <p:nvSpPr>
-          <p:cNvPr id="15" name="TextBox 14"/>
-          <p:cNvSpPr txBox="1"/>
-          <p:nvPr/>
-        </p:nvSpPr>
-        <p:spPr>
-          <a:xfrm>
-            <a:off x="3840480" y="2167128"/>
-            <a:ext cx="2423160" cy="228600"/>
-          </a:xfrm>
-          <a:prstGeom prst="rect">
-            <a:avLst/>
-          </a:prstGeom>
-          <a:noFill/>
-        </p:spPr>
-        <p:txBody>
-          <a:bodyPr wrap="square" lIns="36576" rIns="36576" tIns="36576" bIns="36576" anchor="ctr">
-            <a:spAutoFit/>
-          </a:bodyPr>
-          <a:lstStyle/>
-          <a:p>
-            <a:pPr algn="ctr">
-              <a:lnSpc>
-                <a:spcPct val="105000"/>
-              </a:lnSpc>
-              <a:spcBef>
-                <a:spcPts val="0"/>
-              </a:spcBef>
-              <a:spcAft>
-                <a:spcPts val="0"/>
-              </a:spcAft>
-            </a:pPr>
-            <a:r>
-              <a:rPr sz="1250" b="1" i="0">
-                <a:solidFill>
-                  <a:srgbClr val="D85B66"/>
-                </a:solidFill>
-                <a:latin typeface="Aptos"/>
-              </a:rPr>
-              <a:t>below reported best</a:t>
-            </a:r>
-          </a:p>
-        </p:txBody>
-      </p:sp>
-      <p:cxnSp>
-        <p:nvCxnSpPr>
-          <p:cNvPr id="16" name="Connector 15"/>
-          <p:cNvCxnSpPr/>
-          <p:nvPr/>
-        </p:nvCxnSpPr>
-        <p:spPr>
-          <a:xfrm>
-            <a:off x="896112" y="2615184"/>
-            <a:ext cx="6400800" cy="0"/>
-          </a:xfrm>
-          <a:prstGeom prst="line">
-            <a:avLst/>
-          </a:prstGeom>
-          <a:ln w="10160">
-            <a:solidFill>
-              <a:srgbClr val="E9EDF2"/>
-            </a:solidFill>
-          </a:ln>
-        </p:spPr>
-        <p:style>
-          <a:lnRef idx="2">
-            <a:schemeClr val="accent1"/>
-          </a:lnRef>
-          <a:fillRef idx="0">
-            <a:schemeClr val="accent1"/>
-          </a:fillRef>
-          <a:effectRef idx="1">
-            <a:schemeClr val="accent1"/>
-          </a:effectRef>
-          <a:fontRef idx="minor">
-            <a:schemeClr val="tx1"/>
-          </a:fontRef>
-        </p:style>
-      </p:cxnSp>
-      <p:sp>
-        <p:nvSpPr>
-          <p:cNvPr id="17" name="TextBox 16"/>
-          <p:cNvSpPr txBox="1"/>
-          <p:nvPr/>
-        </p:nvSpPr>
-        <p:spPr>
-          <a:xfrm>
-            <a:off x="932688" y="2724912"/>
-            <a:ext cx="1005840" cy="228600"/>
-          </a:xfrm>
-          <a:prstGeom prst="rect">
-            <a:avLst/>
-          </a:prstGeom>
-          <a:noFill/>
-        </p:spPr>
-        <p:txBody>
-          <a:bodyPr wrap="square" lIns="36576" rIns="36576" tIns="36576" bIns="36576" anchor="t">
-            <a:spAutoFit/>
-          </a:bodyPr>
-          <a:lstStyle/>
-          <a:p>
-            <a:pPr algn="l">
-              <a:lnSpc>
-                <a:spcPct val="105000"/>
-              </a:lnSpc>
-              <a:spcBef>
-                <a:spcPts val="0"/>
-              </a:spcBef>
-              <a:spcAft>
-                <a:spcPts val="0"/>
-              </a:spcAft>
-            </a:pPr>
-            <a:r>
-              <a:rPr sz="1600" b="1" i="0">
-                <a:solidFill>
-                  <a:srgbClr val="172033"/>
-                </a:solidFill>
-                <a:latin typeface="Aptos"/>
-              </a:rPr>
-              <a:t>Jpn-H</a:t>
-            </a:r>
-          </a:p>
-        </p:txBody>
-      </p:sp>
-      <p:sp>
-        <p:nvSpPr>
-          <p:cNvPr id="18" name="TextBox 17"/>
-          <p:cNvSpPr txBox="1"/>
-          <p:nvPr/>
-        </p:nvSpPr>
-        <p:spPr>
-          <a:xfrm>
-            <a:off x="2240280" y="2724912"/>
-            <a:ext cx="960120" cy="228600"/>
-          </a:xfrm>
-          <a:prstGeom prst="rect">
-            <a:avLst/>
-          </a:prstGeom>
-          <a:noFill/>
-        </p:spPr>
-        <p:txBody>
-          <a:bodyPr wrap="square" lIns="36576" rIns="36576" tIns="36576" bIns="36576" anchor="t">
-            <a:spAutoFit/>
-          </a:bodyPr>
-          <a:lstStyle/>
-          <a:p>
-            <a:pPr algn="l">
-              <a:lnSpc>
-                <a:spcPct val="105000"/>
-              </a:lnSpc>
-              <a:spcBef>
-                <a:spcPts val="0"/>
-              </a:spcBef>
-              <a:spcAft>
-                <a:spcPts val="0"/>
-              </a:spcAft>
-            </a:pPr>
-            <a:r>
-              <a:rPr sz="1700" b="1" i="0">
-                <a:solidFill>
-                  <a:srgbClr val="173B5E"/>
-                </a:solidFill>
-                <a:latin typeface="Aptos"/>
-              </a:rPr>
-              <a:t>0.4500</a:t>
-            </a:r>
-          </a:p>
-        </p:txBody>
-      </p:sp>
-      <p:sp>
-        <p:nvSpPr>
-          <p:cNvPr id="19" name="Rounded Rectangle 18"/>
-          <p:cNvSpPr/>
-          <p:nvPr/>
-        </p:nvSpPr>
-        <p:spPr>
-          <a:xfrm>
-            <a:off x="3794760" y="2697480"/>
             <a:ext cx="2514600" cy="310896"/>
           </a:xfrm>
           <a:prstGeom prst="roundRect">
@@ -4320,13 +4103,13 @@
       </p:sp>
       <p:sp>
         <p:nvSpPr>
-          <p:cNvPr id="20" name="TextBox 19"/>
-          <p:cNvSpPr txBox="1"/>
-          <p:nvPr/>
-        </p:nvSpPr>
-        <p:spPr>
-          <a:xfrm>
-            <a:off x="3840480" y="2715768"/>
+          <p:cNvPr id="15" name="TextBox 14"/>
+          <p:cNvSpPr txBox="1"/>
+          <p:nvPr/>
+        </p:nvSpPr>
+        <p:spPr>
+          <a:xfrm>
+            <a:off x="3840480" y="2167128"/>
             <a:ext cx="2423160" cy="228600"/>
           </a:xfrm>
           <a:prstGeom prst="rect">
@@ -4358,20 +4141,20 @@
                 </a:solidFill>
                 <a:latin typeface="Aptos"/>
               </a:rPr>
-              <a:t>reported top ↑</a:t>
+              <a:t>dev-selected</a:t>
             </a:r>
           </a:p>
         </p:txBody>
       </p:sp>
       <p:cxnSp>
         <p:nvCxnSpPr>
-          <p:cNvPr id="21" name="Connector 20"/>
+          <p:cNvPr id="16" name="Connector 15"/>
           <p:cNvCxnSpPr/>
           <p:nvPr/>
         </p:nvCxnSpPr>
         <p:spPr>
           <a:xfrm>
-            <a:off x="896112" y="3163824"/>
+            <a:off x="896112" y="2615184"/>
             <a:ext cx="6400800" cy="0"/>
           </a:xfrm>
           <a:prstGeom prst="line">
@@ -4400,13 +4183,13 @@
       </p:cxnSp>
       <p:sp>
         <p:nvSpPr>
-          <p:cNvPr id="22" name="TextBox 21"/>
-          <p:cNvSpPr txBox="1"/>
-          <p:nvPr/>
-        </p:nvSpPr>
-        <p:spPr>
-          <a:xfrm>
-            <a:off x="932688" y="3273552"/>
+          <p:cNvPr id="17" name="TextBox 16"/>
+          <p:cNvSpPr txBox="1"/>
+          <p:nvPr/>
+        </p:nvSpPr>
+        <p:spPr>
+          <a:xfrm>
+            <a:off x="932688" y="2724912"/>
             <a:ext cx="1005840" cy="228600"/>
           </a:xfrm>
           <a:prstGeom prst="rect">
@@ -4438,20 +4221,20 @@
                 </a:solidFill>
                 <a:latin typeface="Aptos"/>
               </a:rPr>
-              <a:t>Rus-R</a:t>
-            </a:r>
-          </a:p>
-        </p:txBody>
-      </p:sp>
-      <p:sp>
-        <p:nvSpPr>
-          <p:cNvPr id="23" name="TextBox 22"/>
-          <p:cNvSpPr txBox="1"/>
-          <p:nvPr/>
-        </p:nvSpPr>
-        <p:spPr>
-          <a:xfrm>
-            <a:off x="2240280" y="3273552"/>
+              <a:t>Jpn-H</a:t>
+            </a:r>
+          </a:p>
+        </p:txBody>
+      </p:sp>
+      <p:sp>
+        <p:nvSpPr>
+          <p:cNvPr id="18" name="TextBox 17"/>
+          <p:cNvSpPr txBox="1"/>
+          <p:nvPr/>
+        </p:nvSpPr>
+        <p:spPr>
+          <a:xfrm>
+            <a:off x="2240280" y="2724912"/>
             <a:ext cx="960120" cy="228600"/>
           </a:xfrm>
           <a:prstGeom prst="rect">
@@ -4483,237 +4266,20 @@
                 </a:solidFill>
                 <a:latin typeface="Aptos"/>
               </a:rPr>
-              <a:t>0.5267</a:t>
-            </a:r>
-          </a:p>
-        </p:txBody>
-      </p:sp>
-      <p:sp>
-        <p:nvSpPr>
-          <p:cNvPr id="24" name="Rounded Rectangle 23"/>
+              <a:t>0.4500</a:t>
+            </a:r>
+          </a:p>
+        </p:txBody>
+      </p:sp>
+      <p:sp>
+        <p:nvSpPr>
+          <p:cNvPr id="19" name="Rounded Rectangle 18"/>
           <p:cNvSpPr/>
           <p:nvPr/>
         </p:nvSpPr>
         <p:spPr>
           <a:xfrm>
-            <a:off x="3794760" y="3246120"/>
-            <a:ext cx="2514600" cy="310896"/>
-          </a:xfrm>
-          <a:prstGeom prst="roundRect">
-            <a:avLst>
-              <a:gd name="adj" fmla="val 10000"/>
-            </a:avLst>
-          </a:prstGeom>
-          <a:solidFill>
-            <a:srgbClr val="FCEAEC"/>
-          </a:solidFill>
-          <a:ln>
-            <a:solidFill>
-              <a:srgbClr val="FCEAEC"/>
-            </a:solidFill>
-          </a:ln>
-        </p:spPr>
-        <p:style>
-          <a:lnRef idx="1">
-            <a:schemeClr val="accent1"/>
-          </a:lnRef>
-          <a:fillRef idx="3">
-            <a:schemeClr val="accent1"/>
-          </a:fillRef>
-          <a:effectRef idx="2">
-            <a:schemeClr val="accent1"/>
-          </a:effectRef>
-          <a:fontRef idx="minor">
-            <a:schemeClr val="lt1"/>
-          </a:fontRef>
-        </p:style>
-        <p:txBody>
-          <a:bodyPr rtlCol="0" anchor="ctr"/>
-          <a:lstStyle/>
-          <a:p>
-            <a:pPr algn="ctr"/>
-          </a:p>
-        </p:txBody>
-      </p:sp>
-      <p:sp>
-        <p:nvSpPr>
-          <p:cNvPr id="25" name="TextBox 24"/>
-          <p:cNvSpPr txBox="1"/>
-          <p:nvPr/>
-        </p:nvSpPr>
-        <p:spPr>
-          <a:xfrm>
-            <a:off x="3840480" y="3264408"/>
-            <a:ext cx="2423160" cy="228600"/>
-          </a:xfrm>
-          <a:prstGeom prst="rect">
-            <a:avLst/>
-          </a:prstGeom>
-          <a:noFill/>
-        </p:spPr>
-        <p:txBody>
-          <a:bodyPr wrap="square" lIns="36576" rIns="36576" tIns="36576" bIns="36576" anchor="ctr">
-            <a:spAutoFit/>
-          </a:bodyPr>
-          <a:lstStyle/>
-          <a:p>
-            <a:pPr algn="ctr">
-              <a:lnSpc>
-                <a:spcPct val="105000"/>
-              </a:lnSpc>
-              <a:spcBef>
-                <a:spcPts val="0"/>
-              </a:spcBef>
-              <a:spcAft>
-                <a:spcPts val="0"/>
-              </a:spcAft>
-            </a:pPr>
-            <a:r>
-              <a:rPr sz="1250" b="1" i="0">
-                <a:solidFill>
-                  <a:srgbClr val="D85B66"/>
-                </a:solidFill>
-                <a:latin typeface="Aptos"/>
-              </a:rPr>
-              <a:t>below reported best</a:t>
-            </a:r>
-          </a:p>
-        </p:txBody>
-      </p:sp>
-      <p:cxnSp>
-        <p:nvCxnSpPr>
-          <p:cNvPr id="26" name="Connector 25"/>
-          <p:cNvCxnSpPr/>
-          <p:nvPr/>
-        </p:nvCxnSpPr>
-        <p:spPr>
-          <a:xfrm>
-            <a:off x="896112" y="3712463"/>
-            <a:ext cx="6400800" cy="0"/>
-          </a:xfrm>
-          <a:prstGeom prst="line">
-            <a:avLst/>
-          </a:prstGeom>
-          <a:ln w="10160">
-            <a:solidFill>
-              <a:srgbClr val="E9EDF2"/>
-            </a:solidFill>
-          </a:ln>
-        </p:spPr>
-        <p:style>
-          <a:lnRef idx="2">
-            <a:schemeClr val="accent1"/>
-          </a:lnRef>
-          <a:fillRef idx="0">
-            <a:schemeClr val="accent1"/>
-          </a:fillRef>
-          <a:effectRef idx="1">
-            <a:schemeClr val="accent1"/>
-          </a:effectRef>
-          <a:fontRef idx="minor">
-            <a:schemeClr val="tx1"/>
-          </a:fontRef>
-        </p:style>
-      </p:cxnSp>
-      <p:sp>
-        <p:nvSpPr>
-          <p:cNvPr id="27" name="TextBox 26"/>
-          <p:cNvSpPr txBox="1"/>
-          <p:nvPr/>
-        </p:nvSpPr>
-        <p:spPr>
-          <a:xfrm>
-            <a:off x="932688" y="3822191"/>
-            <a:ext cx="1005840" cy="228600"/>
-          </a:xfrm>
-          <a:prstGeom prst="rect">
-            <a:avLst/>
-          </a:prstGeom>
-          <a:noFill/>
-        </p:spPr>
-        <p:txBody>
-          <a:bodyPr wrap="square" lIns="36576" rIns="36576" tIns="36576" bIns="36576" anchor="t">
-            <a:spAutoFit/>
-          </a:bodyPr>
-          <a:lstStyle/>
-          <a:p>
-            <a:pPr algn="l">
-              <a:lnSpc>
-                <a:spcPct val="105000"/>
-              </a:lnSpc>
-              <a:spcBef>
-                <a:spcPts val="0"/>
-              </a:spcBef>
-              <a:spcAft>
-                <a:spcPts val="0"/>
-              </a:spcAft>
-            </a:pPr>
-            <a:r>
-              <a:rPr sz="1600" b="1" i="0">
-                <a:solidFill>
-                  <a:srgbClr val="172033"/>
-                </a:solidFill>
-                <a:latin typeface="Aptos"/>
-              </a:rPr>
-              <a:t>Tat-R</a:t>
-            </a:r>
-          </a:p>
-        </p:txBody>
-      </p:sp>
-      <p:sp>
-        <p:nvSpPr>
-          <p:cNvPr id="28" name="TextBox 27"/>
-          <p:cNvSpPr txBox="1"/>
-          <p:nvPr/>
-        </p:nvSpPr>
-        <p:spPr>
-          <a:xfrm>
-            <a:off x="2240280" y="3822191"/>
-            <a:ext cx="960120" cy="228600"/>
-          </a:xfrm>
-          <a:prstGeom prst="rect">
-            <a:avLst/>
-          </a:prstGeom>
-          <a:noFill/>
-        </p:spPr>
-        <p:txBody>
-          <a:bodyPr wrap="square" lIns="36576" rIns="36576" tIns="36576" bIns="36576" anchor="t">
-            <a:spAutoFit/>
-          </a:bodyPr>
-          <a:lstStyle/>
-          <a:p>
-            <a:pPr algn="l">
-              <a:lnSpc>
-                <a:spcPct val="105000"/>
-              </a:lnSpc>
-              <a:spcBef>
-                <a:spcPts val="0"/>
-              </a:spcBef>
-              <a:spcAft>
-                <a:spcPts val="0"/>
-              </a:spcAft>
-            </a:pPr>
-            <a:r>
-              <a:rPr sz="1700" b="1" i="0">
-                <a:solidFill>
-                  <a:srgbClr val="173B5E"/>
-                </a:solidFill>
-                <a:latin typeface="Aptos"/>
-              </a:rPr>
-              <a:t>0.4821</a:t>
-            </a:r>
-          </a:p>
-        </p:txBody>
-      </p:sp>
-      <p:sp>
-        <p:nvSpPr>
-          <p:cNvPr id="29" name="Rounded Rectangle 28"/>
-          <p:cNvSpPr/>
-          <p:nvPr/>
-        </p:nvSpPr>
-        <p:spPr>
-          <a:xfrm>
-            <a:off x="3794760" y="3794759"/>
+            <a:off x="3794760" y="2697480"/>
             <a:ext cx="2514600" cy="310896"/>
           </a:xfrm>
           <a:prstGeom prst="roundRect">
@@ -4754,13 +4320,13 @@
       </p:sp>
       <p:sp>
         <p:nvSpPr>
-          <p:cNvPr id="30" name="TextBox 29"/>
-          <p:cNvSpPr txBox="1"/>
-          <p:nvPr/>
-        </p:nvSpPr>
-        <p:spPr>
-          <a:xfrm>
-            <a:off x="3840480" y="3813047"/>
+          <p:cNvPr id="20" name="TextBox 19"/>
+          <p:cNvSpPr txBox="1"/>
+          <p:nvPr/>
+        </p:nvSpPr>
+        <p:spPr>
+          <a:xfrm>
+            <a:off x="3840480" y="2715768"/>
             <a:ext cx="2423160" cy="228600"/>
           </a:xfrm>
           <a:prstGeom prst="rect">
@@ -4792,20 +4358,20 @@
                 </a:solidFill>
                 <a:latin typeface="Aptos"/>
               </a:rPr>
-              <a:t>reported top ↑</a:t>
+              <a:t>dev-selected</a:t>
             </a:r>
           </a:p>
         </p:txBody>
       </p:sp>
       <p:cxnSp>
         <p:nvCxnSpPr>
-          <p:cNvPr id="31" name="Connector 30"/>
+          <p:cNvPr id="21" name="Connector 20"/>
           <p:cNvCxnSpPr/>
           <p:nvPr/>
         </p:nvCxnSpPr>
         <p:spPr>
           <a:xfrm>
-            <a:off x="896112" y="4261104"/>
+            <a:off x="896112" y="3163824"/>
             <a:ext cx="6400800" cy="0"/>
           </a:xfrm>
           <a:prstGeom prst="line">
@@ -4834,13 +4400,13 @@
       </p:cxnSp>
       <p:sp>
         <p:nvSpPr>
-          <p:cNvPr id="32" name="TextBox 31"/>
-          <p:cNvSpPr txBox="1"/>
-          <p:nvPr/>
-        </p:nvSpPr>
-        <p:spPr>
-          <a:xfrm>
-            <a:off x="932688" y="4370832"/>
+          <p:cNvPr id="22" name="TextBox 21"/>
+          <p:cNvSpPr txBox="1"/>
+          <p:nvPr/>
+        </p:nvSpPr>
+        <p:spPr>
+          <a:xfrm>
+            <a:off x="932688" y="3273552"/>
             <a:ext cx="1005840" cy="228600"/>
           </a:xfrm>
           <a:prstGeom prst="rect">
@@ -4872,20 +4438,20 @@
                 </a:solidFill>
                 <a:latin typeface="Aptos"/>
               </a:rPr>
-              <a:t>Ukr-R</a:t>
-            </a:r>
-          </a:p>
-        </p:txBody>
-      </p:sp>
-      <p:sp>
-        <p:nvSpPr>
-          <p:cNvPr id="33" name="TextBox 32"/>
-          <p:cNvSpPr txBox="1"/>
-          <p:nvPr/>
-        </p:nvSpPr>
-        <p:spPr>
-          <a:xfrm>
-            <a:off x="2240280" y="4370832"/>
+              <a:t>Rus-R</a:t>
+            </a:r>
+          </a:p>
+        </p:txBody>
+      </p:sp>
+      <p:sp>
+        <p:nvSpPr>
+          <p:cNvPr id="23" name="TextBox 22"/>
+          <p:cNvSpPr txBox="1"/>
+          <p:nvPr/>
+        </p:nvSpPr>
+        <p:spPr>
+          <a:xfrm>
+            <a:off x="2240280" y="3273552"/>
             <a:ext cx="960120" cy="228600"/>
           </a:xfrm>
           <a:prstGeom prst="rect">
@@ -4917,237 +4483,20 @@
                 </a:solidFill>
                 <a:latin typeface="Aptos"/>
               </a:rPr>
-              <a:t>0.5068</a:t>
-            </a:r>
-          </a:p>
-        </p:txBody>
-      </p:sp>
-      <p:sp>
-        <p:nvSpPr>
-          <p:cNvPr id="34" name="Rounded Rectangle 33"/>
+              <a:t>0.5267</a:t>
+            </a:r>
+          </a:p>
+        </p:txBody>
+      </p:sp>
+      <p:sp>
+        <p:nvSpPr>
+          <p:cNvPr id="24" name="Rounded Rectangle 23"/>
           <p:cNvSpPr/>
           <p:nvPr/>
         </p:nvSpPr>
         <p:spPr>
           <a:xfrm>
-            <a:off x="3794760" y="4343400"/>
-            <a:ext cx="2514600" cy="310896"/>
-          </a:xfrm>
-          <a:prstGeom prst="roundRect">
-            <a:avLst>
-              <a:gd name="adj" fmla="val 10000"/>
-            </a:avLst>
-          </a:prstGeom>
-          <a:solidFill>
-            <a:srgbClr val="FCEAEC"/>
-          </a:solidFill>
-          <a:ln>
-            <a:solidFill>
-              <a:srgbClr val="FCEAEC"/>
-            </a:solidFill>
-          </a:ln>
-        </p:spPr>
-        <p:style>
-          <a:lnRef idx="1">
-            <a:schemeClr val="accent1"/>
-          </a:lnRef>
-          <a:fillRef idx="3">
-            <a:schemeClr val="accent1"/>
-          </a:fillRef>
-          <a:effectRef idx="2">
-            <a:schemeClr val="accent1"/>
-          </a:effectRef>
-          <a:fontRef idx="minor">
-            <a:schemeClr val="lt1"/>
-          </a:fontRef>
-        </p:style>
-        <p:txBody>
-          <a:bodyPr rtlCol="0" anchor="ctr"/>
-          <a:lstStyle/>
-          <a:p>
-            <a:pPr algn="ctr"/>
-          </a:p>
-        </p:txBody>
-      </p:sp>
-      <p:sp>
-        <p:nvSpPr>
-          <p:cNvPr id="35" name="TextBox 34"/>
-          <p:cNvSpPr txBox="1"/>
-          <p:nvPr/>
-        </p:nvSpPr>
-        <p:spPr>
-          <a:xfrm>
-            <a:off x="3840480" y="4361688"/>
-            <a:ext cx="2423160" cy="228600"/>
-          </a:xfrm>
-          <a:prstGeom prst="rect">
-            <a:avLst/>
-          </a:prstGeom>
-          <a:noFill/>
-        </p:spPr>
-        <p:txBody>
-          <a:bodyPr wrap="square" lIns="36576" rIns="36576" tIns="36576" bIns="36576" anchor="ctr">
-            <a:spAutoFit/>
-          </a:bodyPr>
-          <a:lstStyle/>
-          <a:p>
-            <a:pPr algn="ctr">
-              <a:lnSpc>
-                <a:spcPct val="105000"/>
-              </a:lnSpc>
-              <a:spcBef>
-                <a:spcPts val="0"/>
-              </a:spcBef>
-              <a:spcAft>
-                <a:spcPts val="0"/>
-              </a:spcAft>
-            </a:pPr>
-            <a:r>
-              <a:rPr sz="1250" b="1" i="0">
-                <a:solidFill>
-                  <a:srgbClr val="D85B66"/>
-                </a:solidFill>
-                <a:latin typeface="Aptos"/>
-              </a:rPr>
-              <a:t>below reported best</a:t>
-            </a:r>
-          </a:p>
-        </p:txBody>
-      </p:sp>
-      <p:cxnSp>
-        <p:nvCxnSpPr>
-          <p:cNvPr id="36" name="Connector 35"/>
-          <p:cNvCxnSpPr/>
-          <p:nvPr/>
-        </p:nvCxnSpPr>
-        <p:spPr>
-          <a:xfrm>
-            <a:off x="896112" y="4809744"/>
-            <a:ext cx="6400800" cy="0"/>
-          </a:xfrm>
-          <a:prstGeom prst="line">
-            <a:avLst/>
-          </a:prstGeom>
-          <a:ln w="10160">
-            <a:solidFill>
-              <a:srgbClr val="E9EDF2"/>
-            </a:solidFill>
-          </a:ln>
-        </p:spPr>
-        <p:style>
-          <a:lnRef idx="2">
-            <a:schemeClr val="accent1"/>
-          </a:lnRef>
-          <a:fillRef idx="0">
-            <a:schemeClr val="accent1"/>
-          </a:fillRef>
-          <a:effectRef idx="1">
-            <a:schemeClr val="accent1"/>
-          </a:effectRef>
-          <a:fontRef idx="minor">
-            <a:schemeClr val="tx1"/>
-          </a:fontRef>
-        </p:style>
-      </p:cxnSp>
-      <p:sp>
-        <p:nvSpPr>
-          <p:cNvPr id="37" name="TextBox 36"/>
-          <p:cNvSpPr txBox="1"/>
-          <p:nvPr/>
-        </p:nvSpPr>
-        <p:spPr>
-          <a:xfrm>
-            <a:off x="932688" y="4919472"/>
-            <a:ext cx="1005840" cy="228600"/>
-          </a:xfrm>
-          <a:prstGeom prst="rect">
-            <a:avLst/>
-          </a:prstGeom>
-          <a:noFill/>
-        </p:spPr>
-        <p:txBody>
-          <a:bodyPr wrap="square" lIns="36576" rIns="36576" tIns="36576" bIns="36576" anchor="t">
-            <a:spAutoFit/>
-          </a:bodyPr>
-          <a:lstStyle/>
-          <a:p>
-            <a:pPr algn="l">
-              <a:lnSpc>
-                <a:spcPct val="105000"/>
-              </a:lnSpc>
-              <a:spcBef>
-                <a:spcPts val="0"/>
-              </a:spcBef>
-              <a:spcAft>
-                <a:spcPts val="0"/>
-              </a:spcAft>
-            </a:pPr>
-            <a:r>
-              <a:rPr sz="1600" b="1" i="0">
-                <a:solidFill>
-                  <a:srgbClr val="172033"/>
-                </a:solidFill>
-                <a:latin typeface="Aptos"/>
-              </a:rPr>
-              <a:t>Zho-R</a:t>
-            </a:r>
-          </a:p>
-        </p:txBody>
-      </p:sp>
-      <p:sp>
-        <p:nvSpPr>
-          <p:cNvPr id="38" name="TextBox 37"/>
-          <p:cNvSpPr txBox="1"/>
-          <p:nvPr/>
-        </p:nvSpPr>
-        <p:spPr>
-          <a:xfrm>
-            <a:off x="2240280" y="4919472"/>
-            <a:ext cx="960120" cy="228600"/>
-          </a:xfrm>
-          <a:prstGeom prst="rect">
-            <a:avLst/>
-          </a:prstGeom>
-          <a:noFill/>
-        </p:spPr>
-        <p:txBody>
-          <a:bodyPr wrap="square" lIns="36576" rIns="36576" tIns="36576" bIns="36576" anchor="t">
-            <a:spAutoFit/>
-          </a:bodyPr>
-          <a:lstStyle/>
-          <a:p>
-            <a:pPr algn="l">
-              <a:lnSpc>
-                <a:spcPct val="105000"/>
-              </a:lnSpc>
-              <a:spcBef>
-                <a:spcPts val="0"/>
-              </a:spcBef>
-              <a:spcAft>
-                <a:spcPts val="0"/>
-              </a:spcAft>
-            </a:pPr>
-            <a:r>
-              <a:rPr sz="1700" b="1" i="0">
-                <a:solidFill>
-                  <a:srgbClr val="173B5E"/>
-                </a:solidFill>
-                <a:latin typeface="Aptos"/>
-              </a:rPr>
-              <a:t>0.5669</a:t>
-            </a:r>
-          </a:p>
-        </p:txBody>
-      </p:sp>
-      <p:sp>
-        <p:nvSpPr>
-          <p:cNvPr id="39" name="Rounded Rectangle 38"/>
-          <p:cNvSpPr/>
-          <p:nvPr/>
-        </p:nvSpPr>
-        <p:spPr>
-          <a:xfrm>
-            <a:off x="3794760" y="4892040"/>
+            <a:off x="3794760" y="3246120"/>
             <a:ext cx="2514600" cy="310896"/>
           </a:xfrm>
           <a:prstGeom prst="roundRect">
@@ -5188,13 +4537,13 @@
       </p:sp>
       <p:sp>
         <p:nvSpPr>
-          <p:cNvPr id="40" name="TextBox 39"/>
-          <p:cNvSpPr txBox="1"/>
-          <p:nvPr/>
-        </p:nvSpPr>
-        <p:spPr>
-          <a:xfrm>
-            <a:off x="3840480" y="4910327"/>
+          <p:cNvPr id="25" name="TextBox 24"/>
+          <p:cNvSpPr txBox="1"/>
+          <p:nvPr/>
+        </p:nvSpPr>
+        <p:spPr>
+          <a:xfrm>
+            <a:off x="3840480" y="3264408"/>
             <a:ext cx="2423160" cy="228600"/>
           </a:xfrm>
           <a:prstGeom prst="rect">
@@ -5226,20 +4575,20 @@
                 </a:solidFill>
                 <a:latin typeface="Aptos"/>
               </a:rPr>
-              <a:t>reported top ↑</a:t>
+              <a:t>dev-selected</a:t>
             </a:r>
           </a:p>
         </p:txBody>
       </p:sp>
       <p:cxnSp>
         <p:nvCxnSpPr>
-          <p:cNvPr id="41" name="Connector 40"/>
+          <p:cNvPr id="26" name="Connector 25"/>
           <p:cNvCxnSpPr/>
           <p:nvPr/>
         </p:nvCxnSpPr>
         <p:spPr>
           <a:xfrm>
-            <a:off x="896112" y="5358384"/>
+            <a:off x="896112" y="3712463"/>
             <a:ext cx="6400800" cy="0"/>
           </a:xfrm>
           <a:prstGeom prst="line">
@@ -5268,13 +4617,13 @@
       </p:cxnSp>
       <p:sp>
         <p:nvSpPr>
-          <p:cNvPr id="42" name="TextBox 41"/>
-          <p:cNvSpPr txBox="1"/>
-          <p:nvPr/>
-        </p:nvSpPr>
-        <p:spPr>
-          <a:xfrm>
-            <a:off x="932688" y="5468112"/>
+          <p:cNvPr id="27" name="TextBox 26"/>
+          <p:cNvSpPr txBox="1"/>
+          <p:nvPr/>
+        </p:nvSpPr>
+        <p:spPr>
+          <a:xfrm>
+            <a:off x="932688" y="3822191"/>
             <a:ext cx="1005840" cy="228600"/>
           </a:xfrm>
           <a:prstGeom prst="rect">
@@ -5306,20 +4655,20 @@
                 </a:solidFill>
                 <a:latin typeface="Aptos"/>
               </a:rPr>
-              <a:t>Zho-L</a:t>
-            </a:r>
-          </a:p>
-        </p:txBody>
-      </p:sp>
-      <p:sp>
-        <p:nvSpPr>
-          <p:cNvPr id="43" name="TextBox 42"/>
-          <p:cNvSpPr txBox="1"/>
-          <p:nvPr/>
-        </p:nvSpPr>
-        <p:spPr>
-          <a:xfrm>
-            <a:off x="2240280" y="5468112"/>
+              <a:t>Tat-R</a:t>
+            </a:r>
+          </a:p>
+        </p:txBody>
+      </p:sp>
+      <p:sp>
+        <p:nvSpPr>
+          <p:cNvPr id="28" name="TextBox 27"/>
+          <p:cNvSpPr txBox="1"/>
+          <p:nvPr/>
+        </p:nvSpPr>
+        <p:spPr>
+          <a:xfrm>
+            <a:off x="2240280" y="3822191"/>
             <a:ext cx="960120" cy="228600"/>
           </a:xfrm>
           <a:prstGeom prst="rect">
@@ -5351,20 +4700,20 @@
                 </a:solidFill>
                 <a:latin typeface="Aptos"/>
               </a:rPr>
-              <a:t>0.4487</a:t>
-            </a:r>
-          </a:p>
-        </p:txBody>
-      </p:sp>
-      <p:sp>
-        <p:nvSpPr>
-          <p:cNvPr id="44" name="Rounded Rectangle 43"/>
+              <a:t>0.4821</a:t>
+            </a:r>
+          </a:p>
+        </p:txBody>
+      </p:sp>
+      <p:sp>
+        <p:nvSpPr>
+          <p:cNvPr id="29" name="Rounded Rectangle 28"/>
           <p:cNvSpPr/>
           <p:nvPr/>
         </p:nvSpPr>
         <p:spPr>
           <a:xfrm>
-            <a:off x="3794760" y="5440680"/>
+            <a:off x="3794760" y="3794759"/>
             <a:ext cx="2514600" cy="310896"/>
           </a:xfrm>
           <a:prstGeom prst="roundRect">
@@ -5373,11 +4722,11 @@
             </a:avLst>
           </a:prstGeom>
           <a:solidFill>
-            <a:srgbClr val="FCEAEC"/>
+            <a:srgbClr val="E8F5ED"/>
           </a:solidFill>
           <a:ln>
             <a:solidFill>
-              <a:srgbClr val="FCEAEC"/>
+              <a:srgbClr val="E8F5ED"/>
             </a:solidFill>
           </a:ln>
         </p:spPr>
@@ -5405,6 +4754,657 @@
       </p:sp>
       <p:sp>
         <p:nvSpPr>
+          <p:cNvPr id="30" name="TextBox 29"/>
+          <p:cNvSpPr txBox="1"/>
+          <p:nvPr/>
+        </p:nvSpPr>
+        <p:spPr>
+          <a:xfrm>
+            <a:off x="3840480" y="3813047"/>
+            <a:ext cx="2423160" cy="228600"/>
+          </a:xfrm>
+          <a:prstGeom prst="rect">
+            <a:avLst/>
+          </a:prstGeom>
+          <a:noFill/>
+        </p:spPr>
+        <p:txBody>
+          <a:bodyPr wrap="square" lIns="36576" rIns="36576" tIns="36576" bIns="36576" anchor="ctr">
+            <a:spAutoFit/>
+          </a:bodyPr>
+          <a:lstStyle/>
+          <a:p>
+            <a:pPr algn="ctr">
+              <a:lnSpc>
+                <a:spcPct val="105000"/>
+              </a:lnSpc>
+              <a:spcBef>
+                <a:spcPts val="0"/>
+              </a:spcBef>
+              <a:spcAft>
+                <a:spcPts val="0"/>
+              </a:spcAft>
+            </a:pPr>
+            <a:r>
+              <a:rPr sz="1250" b="1" i="0">
+                <a:solidFill>
+                  <a:srgbClr val="2E9B67"/>
+                </a:solidFill>
+                <a:latin typeface="Aptos"/>
+              </a:rPr>
+              <a:t>dev-selected</a:t>
+            </a:r>
+          </a:p>
+        </p:txBody>
+      </p:sp>
+      <p:cxnSp>
+        <p:nvCxnSpPr>
+          <p:cNvPr id="31" name="Connector 30"/>
+          <p:cNvCxnSpPr/>
+          <p:nvPr/>
+        </p:nvCxnSpPr>
+        <p:spPr>
+          <a:xfrm>
+            <a:off x="896112" y="4261104"/>
+            <a:ext cx="6400800" cy="0"/>
+          </a:xfrm>
+          <a:prstGeom prst="line">
+            <a:avLst/>
+          </a:prstGeom>
+          <a:ln w="10160">
+            <a:solidFill>
+              <a:srgbClr val="E9EDF2"/>
+            </a:solidFill>
+          </a:ln>
+        </p:spPr>
+        <p:style>
+          <a:lnRef idx="2">
+            <a:schemeClr val="accent1"/>
+          </a:lnRef>
+          <a:fillRef idx="0">
+            <a:schemeClr val="accent1"/>
+          </a:fillRef>
+          <a:effectRef idx="1">
+            <a:schemeClr val="accent1"/>
+          </a:effectRef>
+          <a:fontRef idx="minor">
+            <a:schemeClr val="tx1"/>
+          </a:fontRef>
+        </p:style>
+      </p:cxnSp>
+      <p:sp>
+        <p:nvSpPr>
+          <p:cNvPr id="32" name="TextBox 31"/>
+          <p:cNvSpPr txBox="1"/>
+          <p:nvPr/>
+        </p:nvSpPr>
+        <p:spPr>
+          <a:xfrm>
+            <a:off x="932688" y="4370832"/>
+            <a:ext cx="1005840" cy="228600"/>
+          </a:xfrm>
+          <a:prstGeom prst="rect">
+            <a:avLst/>
+          </a:prstGeom>
+          <a:noFill/>
+        </p:spPr>
+        <p:txBody>
+          <a:bodyPr wrap="square" lIns="36576" rIns="36576" tIns="36576" bIns="36576" anchor="t">
+            <a:spAutoFit/>
+          </a:bodyPr>
+          <a:lstStyle/>
+          <a:p>
+            <a:pPr algn="l">
+              <a:lnSpc>
+                <a:spcPct val="105000"/>
+              </a:lnSpc>
+              <a:spcBef>
+                <a:spcPts val="0"/>
+              </a:spcBef>
+              <a:spcAft>
+                <a:spcPts val="0"/>
+              </a:spcAft>
+            </a:pPr>
+            <a:r>
+              <a:rPr sz="1600" b="1" i="0">
+                <a:solidFill>
+                  <a:srgbClr val="172033"/>
+                </a:solidFill>
+                <a:latin typeface="Aptos"/>
+              </a:rPr>
+              <a:t>Ukr-R</a:t>
+            </a:r>
+          </a:p>
+        </p:txBody>
+      </p:sp>
+      <p:sp>
+        <p:nvSpPr>
+          <p:cNvPr id="33" name="TextBox 32"/>
+          <p:cNvSpPr txBox="1"/>
+          <p:nvPr/>
+        </p:nvSpPr>
+        <p:spPr>
+          <a:xfrm>
+            <a:off x="2240280" y="4370832"/>
+            <a:ext cx="960120" cy="228600"/>
+          </a:xfrm>
+          <a:prstGeom prst="rect">
+            <a:avLst/>
+          </a:prstGeom>
+          <a:noFill/>
+        </p:spPr>
+        <p:txBody>
+          <a:bodyPr wrap="square" lIns="36576" rIns="36576" tIns="36576" bIns="36576" anchor="t">
+            <a:spAutoFit/>
+          </a:bodyPr>
+          <a:lstStyle/>
+          <a:p>
+            <a:pPr algn="l">
+              <a:lnSpc>
+                <a:spcPct val="105000"/>
+              </a:lnSpc>
+              <a:spcBef>
+                <a:spcPts val="0"/>
+              </a:spcBef>
+              <a:spcAft>
+                <a:spcPts val="0"/>
+              </a:spcAft>
+            </a:pPr>
+            <a:r>
+              <a:rPr sz="1700" b="1" i="0">
+                <a:solidFill>
+                  <a:srgbClr val="173B5E"/>
+                </a:solidFill>
+                <a:latin typeface="Aptos"/>
+              </a:rPr>
+              <a:t>0.5068</a:t>
+            </a:r>
+          </a:p>
+        </p:txBody>
+      </p:sp>
+      <p:sp>
+        <p:nvSpPr>
+          <p:cNvPr id="34" name="Rounded Rectangle 33"/>
+          <p:cNvSpPr/>
+          <p:nvPr/>
+        </p:nvSpPr>
+        <p:spPr>
+          <a:xfrm>
+            <a:off x="3794760" y="4343400"/>
+            <a:ext cx="2514600" cy="310896"/>
+          </a:xfrm>
+          <a:prstGeom prst="roundRect">
+            <a:avLst>
+              <a:gd name="adj" fmla="val 10000"/>
+            </a:avLst>
+          </a:prstGeom>
+          <a:solidFill>
+            <a:srgbClr val="E8F5ED"/>
+          </a:solidFill>
+          <a:ln>
+            <a:solidFill>
+              <a:srgbClr val="E8F5ED"/>
+            </a:solidFill>
+          </a:ln>
+        </p:spPr>
+        <p:style>
+          <a:lnRef idx="1">
+            <a:schemeClr val="accent1"/>
+          </a:lnRef>
+          <a:fillRef idx="3">
+            <a:schemeClr val="accent1"/>
+          </a:fillRef>
+          <a:effectRef idx="2">
+            <a:schemeClr val="accent1"/>
+          </a:effectRef>
+          <a:fontRef idx="minor">
+            <a:schemeClr val="lt1"/>
+          </a:fontRef>
+        </p:style>
+        <p:txBody>
+          <a:bodyPr rtlCol="0" anchor="ctr"/>
+          <a:lstStyle/>
+          <a:p>
+            <a:pPr algn="ctr"/>
+          </a:p>
+        </p:txBody>
+      </p:sp>
+      <p:sp>
+        <p:nvSpPr>
+          <p:cNvPr id="35" name="TextBox 34"/>
+          <p:cNvSpPr txBox="1"/>
+          <p:nvPr/>
+        </p:nvSpPr>
+        <p:spPr>
+          <a:xfrm>
+            <a:off x="3840480" y="4361688"/>
+            <a:ext cx="2423160" cy="228600"/>
+          </a:xfrm>
+          <a:prstGeom prst="rect">
+            <a:avLst/>
+          </a:prstGeom>
+          <a:noFill/>
+        </p:spPr>
+        <p:txBody>
+          <a:bodyPr wrap="square" lIns="36576" rIns="36576" tIns="36576" bIns="36576" anchor="ctr">
+            <a:spAutoFit/>
+          </a:bodyPr>
+          <a:lstStyle/>
+          <a:p>
+            <a:pPr algn="ctr">
+              <a:lnSpc>
+                <a:spcPct val="105000"/>
+              </a:lnSpc>
+              <a:spcBef>
+                <a:spcPts val="0"/>
+              </a:spcBef>
+              <a:spcAft>
+                <a:spcPts val="0"/>
+              </a:spcAft>
+            </a:pPr>
+            <a:r>
+              <a:rPr sz="1250" b="1" i="0">
+                <a:solidFill>
+                  <a:srgbClr val="2E9B67"/>
+                </a:solidFill>
+                <a:latin typeface="Aptos"/>
+              </a:rPr>
+              <a:t>dev-selected</a:t>
+            </a:r>
+          </a:p>
+        </p:txBody>
+      </p:sp>
+      <p:cxnSp>
+        <p:nvCxnSpPr>
+          <p:cNvPr id="36" name="Connector 35"/>
+          <p:cNvCxnSpPr/>
+          <p:nvPr/>
+        </p:nvCxnSpPr>
+        <p:spPr>
+          <a:xfrm>
+            <a:off x="896112" y="4809744"/>
+            <a:ext cx="6400800" cy="0"/>
+          </a:xfrm>
+          <a:prstGeom prst="line">
+            <a:avLst/>
+          </a:prstGeom>
+          <a:ln w="10160">
+            <a:solidFill>
+              <a:srgbClr val="E9EDF2"/>
+            </a:solidFill>
+          </a:ln>
+        </p:spPr>
+        <p:style>
+          <a:lnRef idx="2">
+            <a:schemeClr val="accent1"/>
+          </a:lnRef>
+          <a:fillRef idx="0">
+            <a:schemeClr val="accent1"/>
+          </a:fillRef>
+          <a:effectRef idx="1">
+            <a:schemeClr val="accent1"/>
+          </a:effectRef>
+          <a:fontRef idx="minor">
+            <a:schemeClr val="tx1"/>
+          </a:fontRef>
+        </p:style>
+      </p:cxnSp>
+      <p:sp>
+        <p:nvSpPr>
+          <p:cNvPr id="37" name="TextBox 36"/>
+          <p:cNvSpPr txBox="1"/>
+          <p:nvPr/>
+        </p:nvSpPr>
+        <p:spPr>
+          <a:xfrm>
+            <a:off x="932688" y="4919472"/>
+            <a:ext cx="1005840" cy="228600"/>
+          </a:xfrm>
+          <a:prstGeom prst="rect">
+            <a:avLst/>
+          </a:prstGeom>
+          <a:noFill/>
+        </p:spPr>
+        <p:txBody>
+          <a:bodyPr wrap="square" lIns="36576" rIns="36576" tIns="36576" bIns="36576" anchor="t">
+            <a:spAutoFit/>
+          </a:bodyPr>
+          <a:lstStyle/>
+          <a:p>
+            <a:pPr algn="l">
+              <a:lnSpc>
+                <a:spcPct val="105000"/>
+              </a:lnSpc>
+              <a:spcBef>
+                <a:spcPts val="0"/>
+              </a:spcBef>
+              <a:spcAft>
+                <a:spcPts val="0"/>
+              </a:spcAft>
+            </a:pPr>
+            <a:r>
+              <a:rPr sz="1600" b="1" i="0">
+                <a:solidFill>
+                  <a:srgbClr val="172033"/>
+                </a:solidFill>
+                <a:latin typeface="Aptos"/>
+              </a:rPr>
+              <a:t>Zho-R</a:t>
+            </a:r>
+          </a:p>
+        </p:txBody>
+      </p:sp>
+      <p:sp>
+        <p:nvSpPr>
+          <p:cNvPr id="38" name="TextBox 37"/>
+          <p:cNvSpPr txBox="1"/>
+          <p:nvPr/>
+        </p:nvSpPr>
+        <p:spPr>
+          <a:xfrm>
+            <a:off x="2240280" y="4919472"/>
+            <a:ext cx="960120" cy="228600"/>
+          </a:xfrm>
+          <a:prstGeom prst="rect">
+            <a:avLst/>
+          </a:prstGeom>
+          <a:noFill/>
+        </p:spPr>
+        <p:txBody>
+          <a:bodyPr wrap="square" lIns="36576" rIns="36576" tIns="36576" bIns="36576" anchor="t">
+            <a:spAutoFit/>
+          </a:bodyPr>
+          <a:lstStyle/>
+          <a:p>
+            <a:pPr algn="l">
+              <a:lnSpc>
+                <a:spcPct val="105000"/>
+              </a:lnSpc>
+              <a:spcBef>
+                <a:spcPts val="0"/>
+              </a:spcBef>
+              <a:spcAft>
+                <a:spcPts val="0"/>
+              </a:spcAft>
+            </a:pPr>
+            <a:r>
+              <a:rPr sz="1700" b="1" i="0">
+                <a:solidFill>
+                  <a:srgbClr val="173B5E"/>
+                </a:solidFill>
+                <a:latin typeface="Aptos"/>
+              </a:rPr>
+              <a:t>0.5669</a:t>
+            </a:r>
+          </a:p>
+        </p:txBody>
+      </p:sp>
+      <p:sp>
+        <p:nvSpPr>
+          <p:cNvPr id="39" name="Rounded Rectangle 38"/>
+          <p:cNvSpPr/>
+          <p:nvPr/>
+        </p:nvSpPr>
+        <p:spPr>
+          <a:xfrm>
+            <a:off x="3794760" y="4892040"/>
+            <a:ext cx="2514600" cy="310896"/>
+          </a:xfrm>
+          <a:prstGeom prst="roundRect">
+            <a:avLst>
+              <a:gd name="adj" fmla="val 10000"/>
+            </a:avLst>
+          </a:prstGeom>
+          <a:solidFill>
+            <a:srgbClr val="E8F5ED"/>
+          </a:solidFill>
+          <a:ln>
+            <a:solidFill>
+              <a:srgbClr val="E8F5ED"/>
+            </a:solidFill>
+          </a:ln>
+        </p:spPr>
+        <p:style>
+          <a:lnRef idx="1">
+            <a:schemeClr val="accent1"/>
+          </a:lnRef>
+          <a:fillRef idx="3">
+            <a:schemeClr val="accent1"/>
+          </a:fillRef>
+          <a:effectRef idx="2">
+            <a:schemeClr val="accent1"/>
+          </a:effectRef>
+          <a:fontRef idx="minor">
+            <a:schemeClr val="lt1"/>
+          </a:fontRef>
+        </p:style>
+        <p:txBody>
+          <a:bodyPr rtlCol="0" anchor="ctr"/>
+          <a:lstStyle/>
+          <a:p>
+            <a:pPr algn="ctr"/>
+          </a:p>
+        </p:txBody>
+      </p:sp>
+      <p:sp>
+        <p:nvSpPr>
+          <p:cNvPr id="40" name="TextBox 39"/>
+          <p:cNvSpPr txBox="1"/>
+          <p:nvPr/>
+        </p:nvSpPr>
+        <p:spPr>
+          <a:xfrm>
+            <a:off x="3840480" y="4910327"/>
+            <a:ext cx="2423160" cy="228600"/>
+          </a:xfrm>
+          <a:prstGeom prst="rect">
+            <a:avLst/>
+          </a:prstGeom>
+          <a:noFill/>
+        </p:spPr>
+        <p:txBody>
+          <a:bodyPr wrap="square" lIns="36576" rIns="36576" tIns="36576" bIns="36576" anchor="ctr">
+            <a:spAutoFit/>
+          </a:bodyPr>
+          <a:lstStyle/>
+          <a:p>
+            <a:pPr algn="ctr">
+              <a:lnSpc>
+                <a:spcPct val="105000"/>
+              </a:lnSpc>
+              <a:spcBef>
+                <a:spcPts val="0"/>
+              </a:spcBef>
+              <a:spcAft>
+                <a:spcPts val="0"/>
+              </a:spcAft>
+            </a:pPr>
+            <a:r>
+              <a:rPr sz="1250" b="1" i="0">
+                <a:solidFill>
+                  <a:srgbClr val="2E9B67"/>
+                </a:solidFill>
+                <a:latin typeface="Aptos"/>
+              </a:rPr>
+              <a:t>dev-selected</a:t>
+            </a:r>
+          </a:p>
+        </p:txBody>
+      </p:sp>
+      <p:cxnSp>
+        <p:nvCxnSpPr>
+          <p:cNvPr id="41" name="Connector 40"/>
+          <p:cNvCxnSpPr/>
+          <p:nvPr/>
+        </p:nvCxnSpPr>
+        <p:spPr>
+          <a:xfrm>
+            <a:off x="896112" y="5358384"/>
+            <a:ext cx="6400800" cy="0"/>
+          </a:xfrm>
+          <a:prstGeom prst="line">
+            <a:avLst/>
+          </a:prstGeom>
+          <a:ln w="10160">
+            <a:solidFill>
+              <a:srgbClr val="E9EDF2"/>
+            </a:solidFill>
+          </a:ln>
+        </p:spPr>
+        <p:style>
+          <a:lnRef idx="2">
+            <a:schemeClr val="accent1"/>
+          </a:lnRef>
+          <a:fillRef idx="0">
+            <a:schemeClr val="accent1"/>
+          </a:fillRef>
+          <a:effectRef idx="1">
+            <a:schemeClr val="accent1"/>
+          </a:effectRef>
+          <a:fontRef idx="minor">
+            <a:schemeClr val="tx1"/>
+          </a:fontRef>
+        </p:style>
+      </p:cxnSp>
+      <p:sp>
+        <p:nvSpPr>
+          <p:cNvPr id="42" name="TextBox 41"/>
+          <p:cNvSpPr txBox="1"/>
+          <p:nvPr/>
+        </p:nvSpPr>
+        <p:spPr>
+          <a:xfrm>
+            <a:off x="932688" y="5468112"/>
+            <a:ext cx="1005840" cy="228600"/>
+          </a:xfrm>
+          <a:prstGeom prst="rect">
+            <a:avLst/>
+          </a:prstGeom>
+          <a:noFill/>
+        </p:spPr>
+        <p:txBody>
+          <a:bodyPr wrap="square" lIns="36576" rIns="36576" tIns="36576" bIns="36576" anchor="t">
+            <a:spAutoFit/>
+          </a:bodyPr>
+          <a:lstStyle/>
+          <a:p>
+            <a:pPr algn="l">
+              <a:lnSpc>
+                <a:spcPct val="105000"/>
+              </a:lnSpc>
+              <a:spcBef>
+                <a:spcPts val="0"/>
+              </a:spcBef>
+              <a:spcAft>
+                <a:spcPts val="0"/>
+              </a:spcAft>
+            </a:pPr>
+            <a:r>
+              <a:rPr sz="1600" b="1" i="0">
+                <a:solidFill>
+                  <a:srgbClr val="172033"/>
+                </a:solidFill>
+                <a:latin typeface="Aptos"/>
+              </a:rPr>
+              <a:t>Zho-L</a:t>
+            </a:r>
+          </a:p>
+        </p:txBody>
+      </p:sp>
+      <p:sp>
+        <p:nvSpPr>
+          <p:cNvPr id="43" name="TextBox 42"/>
+          <p:cNvSpPr txBox="1"/>
+          <p:nvPr/>
+        </p:nvSpPr>
+        <p:spPr>
+          <a:xfrm>
+            <a:off x="2240280" y="5468112"/>
+            <a:ext cx="960120" cy="228600"/>
+          </a:xfrm>
+          <a:prstGeom prst="rect">
+            <a:avLst/>
+          </a:prstGeom>
+          <a:noFill/>
+        </p:spPr>
+        <p:txBody>
+          <a:bodyPr wrap="square" lIns="36576" rIns="36576" tIns="36576" bIns="36576" anchor="t">
+            <a:spAutoFit/>
+          </a:bodyPr>
+          <a:lstStyle/>
+          <a:p>
+            <a:pPr algn="l">
+              <a:lnSpc>
+                <a:spcPct val="105000"/>
+              </a:lnSpc>
+              <a:spcBef>
+                <a:spcPts val="0"/>
+              </a:spcBef>
+              <a:spcAft>
+                <a:spcPts val="0"/>
+              </a:spcAft>
+            </a:pPr>
+            <a:r>
+              <a:rPr sz="1700" b="1" i="0">
+                <a:solidFill>
+                  <a:srgbClr val="173B5E"/>
+                </a:solidFill>
+                <a:latin typeface="Aptos"/>
+              </a:rPr>
+              <a:t>0.4487</a:t>
+            </a:r>
+          </a:p>
+        </p:txBody>
+      </p:sp>
+      <p:sp>
+        <p:nvSpPr>
+          <p:cNvPr id="44" name="Rounded Rectangle 43"/>
+          <p:cNvSpPr/>
+          <p:nvPr/>
+        </p:nvSpPr>
+        <p:spPr>
+          <a:xfrm>
+            <a:off x="3794760" y="5440680"/>
+            <a:ext cx="2514600" cy="310896"/>
+          </a:xfrm>
+          <a:prstGeom prst="roundRect">
+            <a:avLst>
+              <a:gd name="adj" fmla="val 10000"/>
+            </a:avLst>
+          </a:prstGeom>
+          <a:solidFill>
+            <a:srgbClr val="E8F5ED"/>
+          </a:solidFill>
+          <a:ln>
+            <a:solidFill>
+              <a:srgbClr val="E8F5ED"/>
+            </a:solidFill>
+          </a:ln>
+        </p:spPr>
+        <p:style>
+          <a:lnRef idx="1">
+            <a:schemeClr val="accent1"/>
+          </a:lnRef>
+          <a:fillRef idx="3">
+            <a:schemeClr val="accent1"/>
+          </a:fillRef>
+          <a:effectRef idx="2">
+            <a:schemeClr val="accent1"/>
+          </a:effectRef>
+          <a:fontRef idx="minor">
+            <a:schemeClr val="lt1"/>
+          </a:fontRef>
+        </p:style>
+        <p:txBody>
+          <a:bodyPr rtlCol="0" anchor="ctr"/>
+          <a:lstStyle/>
+          <a:p>
+            <a:pPr algn="ctr"/>
+          </a:p>
+        </p:txBody>
+      </p:sp>
+      <p:sp>
+        <p:nvSpPr>
           <p:cNvPr id="45" name="TextBox 44"/>
           <p:cNvSpPr txBox="1"/>
           <p:nvPr/>
@@ -5439,11 +5439,11 @@
             <a:r>
               <a:rPr sz="1250" b="1" i="0">
                 <a:solidFill>
-                  <a:srgbClr val="D85B66"/>
-                </a:solidFill>
-                <a:latin typeface="Aptos"/>
-              </a:rPr>
-              <a:t>below reported best</a:t>
+                  <a:srgbClr val="2E9B67"/>
+                </a:solidFill>
+                <a:latin typeface="Aptos"/>
+              </a:rPr>
+              <a:t>dev-selected</a:t>
             </a:r>
           </a:p>
         </p:txBody>
@@ -5626,8 +5626,8 @@
                 <a:latin typeface="Aptos"/>
               </a:rPr>
               <a:t>• Beats all official dev baselines
-• +11.46 pp vs Llama mean
-• Reported tops: Jpn / Tat / Zho-R</a:t>
+• Improves mean dev cF1
+• Validates recipes per dataset</a:t>
             </a:r>
           </a:p>
         </p:txBody>
@@ -5856,7 +5856,7 @@
                 </a:solidFill>
                 <a:latin typeface="Aptos"/>
               </a:rPr>
-              <a:t>Keep official baselines, reported systems, and hidden-test results distinct.</a:t>
+              <a:t>Keep dev selection, official test, and external systems distinct.</a:t>
             </a:r>
           </a:p>
         </p:txBody>
@@ -5901,7 +5901,7 @@
                 </a:solidFill>
                 <a:latin typeface="Aptos"/>
               </a:rPr>
-              <a:t>External scores are reference comparisons, not hidden-test claims</a:t>
+              <a:t>Historical dev analysis only · current conclusions use the locked official-test evaluation</a:t>
             </a:r>
           </a:p>
         </p:txBody>
@@ -9078,7 +9078,7 @@
                 </a:solidFill>
                 <a:latin typeface="Aptos"/>
               </a:rPr>
-              <a:t>Limitations: the final system is a dataset-specific mixture; comparisons remain dev-based; augmentation relies on near-exact span alignment.</a:t>
+              <a:t>Limitations: the system is a dataset-specific mixture; this deck reports V20 dev selection only; augmentation relies on near-exact span alignment.</a:t>
             </a:r>
           </a:p>
         </p:txBody>
@@ -9830,7 +9830,7 @@
                 </a:solidFill>
                 <a:latin typeface="Aptos"/>
               </a:rPr>
-              <a:t>0.5008 mean dev cF1  ·  +11.46 pp vs Llama-3.3 70B  ·  reported top on Jpn / Tat / Zho-R</a:t>
+              <a:t>0.5008 mean dev cF1  ·  +11.46 pp vs the official Llama development baseline</a:t>
             </a:r>
           </a:p>
         </p:txBody>
@@ -20614,7 +20614,7 @@
                 </a:solidFill>
                 <a:latin typeface="Aptos"/>
               </a:rPr>
-              <a:t>Best validated per-dataset configuration · hidden-test labels not used</a:t>
+              <a:t>Historical pre-release dev selection · official-test evidence is reported separately</a:t>
             </a:r>
           </a:p>
         </p:txBody>
